--- a/frontend/public/samples/quarterly-town-hall.pptx
+++ b/frontend/public/samples/quarterly-town-hall.pptx
@@ -3116,7 +3116,7 @@
       </p:sp>
       <p:pic>
         <p:nvPicPr>
-          <p:cNvPr id="3" name="Picture 2" descr="sample-image.png"/>
+          <p:cNvPr id="3" name="Picture 2"/>
           <p:cNvPicPr>
             <a:picLocks noChangeAspect="1"/>
           </p:cNvPicPr>
@@ -3158,7 +3158,7 @@
       <p:grpSpPr/>
       <p:pic>
         <p:nvPicPr>
-          <p:cNvPr id="2" name="Picture 1" descr="sample-image.png"/>
+          <p:cNvPr id="2" name="Picture 1"/>
           <p:cNvPicPr>
             <a:picLocks noChangeAspect="1"/>
           </p:cNvPicPr>
@@ -3221,7 +3221,7 @@
       </p:sp>
       <p:pic>
         <p:nvPicPr>
-          <p:cNvPr id="3" name="Picture 2" descr="sample-image.png"/>
+          <p:cNvPr id="3" name="Picture 2"/>
           <p:cNvPicPr>
             <a:picLocks noChangeAspect="1"/>
           </p:cNvPicPr>
@@ -3263,7 +3263,7 @@
       <p:grpSpPr/>
       <p:pic>
         <p:nvPicPr>
-          <p:cNvPr id="2" name="Picture 1" descr="sample-image.png"/>
+          <p:cNvPr id="2" name="Picture 1"/>
           <p:cNvPicPr>
             <a:picLocks noChangeAspect="1"/>
           </p:cNvPicPr>
@@ -3326,7 +3326,7 @@
       </p:sp>
       <p:pic>
         <p:nvPicPr>
-          <p:cNvPr id="3" name="Picture 2" descr="sample-image.png"/>
+          <p:cNvPr id="3" name="Picture 2"/>
           <p:cNvPicPr>
             <a:picLocks noChangeAspect="1"/>
           </p:cNvPicPr>
@@ -3368,7 +3368,7 @@
       <p:grpSpPr/>
       <p:pic>
         <p:nvPicPr>
-          <p:cNvPr id="2" name="Picture 1" descr="sample-image.png"/>
+          <p:cNvPr id="2" name="Picture 1"/>
           <p:cNvPicPr>
             <a:picLocks noChangeAspect="1"/>
           </p:cNvPicPr>

--- a/frontend/public/samples/quarterly-town-hall.pptx
+++ b/frontend/public/samples/quarterly-town-hall.pptx
@@ -4,7 +4,7 @@
   <p:sldMasterIdLst>
     <p:sldMasterId id="2147483648" r:id="rId1"/>
   </p:sldMasterIdLst>
-  <p:sldSz cx="9144000" cy="5143500"/>
+  <p:sldSz cx="12192000" cy="6858000"/>
   <p:notesSz cx="6858000" cy="9144000"/>
   <p:sldIdLst>
     <p:sldId id="256" r:id="rId2"/>
@@ -69,21 +69,23 @@
         </p:nvSpPr>
         <p:spPr>
           <a:xfrm>
-            <a:off x="457200" y="1371600"/>
-            <a:ext cx="8229600" cy="1143000"/>
-          </a:xfrm>
-          <a:prstGeom prst="rect">
-            <a:avLst/>
-          </a:prstGeom>
-          <a:noFill/>
-        </p:spPr>
-        <p:txBody>
-          <a:bodyPr/>
-          <a:lstStyle/>
-          <a:p>
-            <a:r>
-              <a:rPr lang="en-US" sz="3600" dirty="0">
-                <a:b/>
+            <a:off x="457200" y="1600000"/>
+            <a:ext cx="11277600" cy="1200000"/>
+          </a:xfrm>
+          <a:prstGeom prst="rect">
+            <a:avLst/>
+          </a:prstGeom>
+          <a:noFill/>
+        </p:spPr>
+        <p:txBody>
+          <a:bodyPr/>
+          <a:lstStyle/>
+          <a:p>
+            <a:r>
+              <a:rPr lang="en-US" sz="4400" dirty="0" b="1">
+                <a:solidFill>
+                  <a:srgbClr val="162A52"/>
+                </a:solidFill>
               </a:rPr>
               <a:t>Q2 2026 Quarterly Town Hall</a:t>
             </a:r>
@@ -92,28 +94,32 @@
       </p:sp>
       <p:sp>
         <p:nvSpPr>
-          <p:cNvPr id="3" name="Subtitle"/>
-          <p:cNvSpPr>
-            <a:spLocks noGrp="1"/>
-          </p:cNvSpPr>
-          <p:nvPr/>
-        </p:nvSpPr>
-        <p:spPr>
-          <a:xfrm>
-            <a:off x="457200" y="2743200"/>
-            <a:ext cx="8229600" cy="685800"/>
-          </a:xfrm>
-          <a:prstGeom prst="rect">
-            <a:avLst/>
-          </a:prstGeom>
-          <a:noFill/>
-        </p:spPr>
-        <p:txBody>
-          <a:bodyPr/>
-          <a:lstStyle/>
-          <a:p>
-            <a:r>
-              <a:rPr lang="en-US" sz="1800" dirty="0"/>
+          <p:cNvPr id="3" name="Sub"/>
+          <p:cNvSpPr>
+            <a:spLocks noGrp="1"/>
+          </p:cNvSpPr>
+          <p:nvPr/>
+        </p:nvSpPr>
+        <p:spPr>
+          <a:xfrm>
+            <a:off x="457200" y="2900000"/>
+            <a:ext cx="11277600" cy="600000"/>
+          </a:xfrm>
+          <a:prstGeom prst="rect">
+            <a:avLst/>
+          </a:prstGeom>
+          <a:noFill/>
+        </p:spPr>
+        <p:txBody>
+          <a:bodyPr/>
+          <a:lstStyle/>
+          <a:p>
+            <a:r>
+              <a:rPr lang="en-US" sz="2000" dirty="0" b="0">
+                <a:solidFill>
+                  <a:srgbClr val="4A5568"/>
+                </a:solidFill>
+              </a:rPr>
               <a:t>UT Southwestern Medical Center  ·  June 19, 2026</a:t>
             </a:r>
           </a:p>
@@ -121,29 +127,66 @@
       </p:sp>
       <p:sp>
         <p:nvSpPr>
-          <p:cNvPr id="4" name="Presenter"/>
-          <p:cNvSpPr>
-            <a:spLocks noGrp="1"/>
-          </p:cNvSpPr>
-          <p:nvPr/>
-        </p:nvSpPr>
-        <p:spPr>
-          <a:xfrm>
-            <a:off x="457200" y="3657600"/>
-            <a:ext cx="8229600" cy="457200"/>
-          </a:xfrm>
-          <a:prstGeom prst="rect">
-            <a:avLst/>
-          </a:prstGeom>
-          <a:noFill/>
-        </p:spPr>
-        <p:txBody>
-          <a:bodyPr/>
-          <a:lstStyle/>
-          <a:p>
-            <a:r>
-              <a:rPr lang="en-US" sz="1400" dirty="0"/>
+          <p:cNvPr id="4" name="Pre"/>
+          <p:cNvSpPr>
+            <a:spLocks noGrp="1"/>
+          </p:cNvSpPr>
+          <p:nvPr/>
+        </p:nvSpPr>
+        <p:spPr>
+          <a:xfrm>
+            <a:off x="457200" y="3600000"/>
+            <a:ext cx="11277600" cy="500000"/>
+          </a:xfrm>
+          <a:prstGeom prst="rect">
+            <a:avLst/>
+          </a:prstGeom>
+          <a:noFill/>
+        </p:spPr>
+        <p:txBody>
+          <a:bodyPr/>
+          <a:lstStyle/>
+          <a:p>
+            <a:r>
+              <a:rPr lang="en-US" sz="1600" dirty="0" b="0">
+                <a:solidFill>
+                  <a:srgbClr val="4A5568"/>
+                </a:solidFill>
+              </a:rPr>
               <a:t>Presented by Jordan Rivera, Chief Operating Officer</a:t>
+            </a:r>
+          </a:p>
+        </p:txBody>
+      </p:sp>
+      <p:sp>
+        <p:nvSpPr>
+          <p:cNvPr id="5" name="Note"/>
+          <p:cNvSpPr>
+            <a:spLocks noGrp="1"/>
+          </p:cNvSpPr>
+          <p:nvPr/>
+        </p:nvSpPr>
+        <p:spPr>
+          <a:xfrm>
+            <a:off x="457200" y="5800000"/>
+            <a:ext cx="11277600" cy="380000"/>
+          </a:xfrm>
+          <a:prstGeom prst="rect">
+            <a:avLst/>
+          </a:prstGeom>
+          <a:noFill/>
+        </p:spPr>
+        <p:txBody>
+          <a:bodyPr/>
+          <a:lstStyle/>
+          <a:p>
+            <a:r>
+              <a:rPr lang="en-US" sz="1200" dirty="0" b="0">
+                <a:solidFill>
+                  <a:srgbClr val="C2185B"/>
+                </a:solidFill>
+              </a:rPr>
+              <a:t>CONFIDENTIAL — For internal distribution only</a:t>
             </a:r>
           </a:p>
         </p:txBody>
@@ -168,7 +211,7 @@
       <p:grpSpPr/>
       <p:pic>
         <p:nvPicPr>
-          <p:cNvPr id="2" name="Chart 1"/>
+          <p:cNvPr id="2" name="Chart_Revenue"/>
           <p:cNvPicPr>
             <a:picLocks noChangeAspect="1"/>
           </p:cNvPicPr>
@@ -182,8 +225,8 @@
         </p:blipFill>
         <p:spPr>
           <a:xfrm>
-            <a:off x="228600" y="228600"/>
-            <a:ext cx="8686800" cy="4686300"/>
+            <a:off x="152400" y="152400"/>
+            <a:ext cx="11887200" cy="6553200"/>
           </a:xfrm>
           <a:prstGeom prst="rect">
             <a:avLst/>
@@ -206,33 +249,20 @@
     <p:nvGrpSpPr><p:cNvPr id="1" name=""/><p:cNvGrpSpPr/><p:nvPr/></p:nvGrpSpPr>
     <p:grpSpPr/>
     <p:sp>
-  <p:nvSpPr>
-    <p:cNvPr id="2" name="Title"/>
-    <p:cNvSpPr><a:spLocks noGrp="1"/></p:cNvSpPr>
-    <p:nvPr/>
-  </p:nvSpPr>
-  <p:spPr>
-    <a:xfrm><a:off x="457200" y="137160"/><a:ext cx="8229600" cy="685800"/></a:xfrm>
-    <a:prstGeom prst="rect"><a:avLst/></a:prstGeom>
-    <a:noFill/>
-  </p:spPr>
-  <p:txBody>
-    <a:bodyPr/>
-    <a:lstStyle/>
-    <a:p><a:r><a:rPr lang="en-US" sz="2400" dirty="0"><a:b/></a:rPr><a:t>Workforce & Headcount</a:t></a:r></a:p>
+  <p:nvSpPr><p:cNvPr id="2" name="Title"/><p:cNvSpPr><a:spLocks noGrp="1"/></p:cNvSpPr><p:nvPr/></p:nvSpPr>
+  <p:spPr><a:xfrm><a:off x="457200" y="80000"/><a:ext cx="11277600" cy="600000"/></a:xfrm><a:prstGeom prst="rect"><a:avLst/></a:prstGeom><a:noFill/></p:spPr>
+  <p:txBody><a:bodyPr/><a:lstStyle/>
+    <a:p><a:r><a:rPr lang="en-US" sz="2600" dirty="0" b="1"><a:solidFill><a:srgbClr val="162A52"/></a:solidFill></a:rPr><a:t>Workforce & Headcount</a:t></a:r></a:p>
   </p:txBody>
 </p:sp><p:pic>
   <p:nvPicPr>
-    <p:cNvPr id="3" name="Chart 2"/>
+    <p:cNvPr id="3" name="Chart_Headcount"/>
     <p:cNvPicPr><a:picLocks noChangeAspect="1"/></p:cNvPicPr>
     <p:nvPr/>
   </p:nvPicPr>
-  <p:blipFill>
-    <a:blip r:embed="rId2"/>
-    <a:stretch><a:fillRect/></a:stretch>
-  </p:blipFill>
+  <p:blipFill><a:blip r:embed="rId2"/><a:stretch><a:fillRect/></a:stretch></p:blipFill>
   <p:spPr>
-    <a:xfrm><a:off x="228600" y="685800"/><a:ext cx="8686800" cy="4228020"/></a:xfrm>
+    <a:xfrm><a:off x="152400" y="685000"/><a:ext cx="11887200" cy="6020600"/></a:xfrm>
     <a:prstGeom prst="rect"><a:avLst/></a:prstGeom>
   </p:spPr>
 </p:pic>
@@ -253,7 +283,7 @@
       <p:grpSpPr/>
       <p:pic>
         <p:nvPicPr>
-          <p:cNvPr id="2" name="Chart 3"/>
+          <p:cNvPr id="2" name="Chart_Table"/>
           <p:cNvPicPr>
             <a:picLocks noChangeAspect="1"/>
           </p:cNvPicPr>
@@ -267,8 +297,8 @@
         </p:blipFill>
         <p:spPr>
           <a:xfrm>
-            <a:off x="228600" y="228600"/>
-            <a:ext cx="8686800" cy="4686300"/>
+            <a:off x="152400" y="152400"/>
+            <a:ext cx="11887200" cy="6553200"/>
           </a:xfrm>
           <a:prstGeom prst="rect">
             <a:avLst/>
@@ -303,21 +333,23 @@
         </p:nvSpPr>
         <p:spPr>
           <a:xfrm>
-            <a:off x="457200" y="137160"/>
-            <a:ext cx="8229600" cy="685800"/>
-          </a:xfrm>
-          <a:prstGeom prst="rect">
-            <a:avLst/>
-          </a:prstGeom>
-          <a:noFill/>
-        </p:spPr>
-        <p:txBody>
-          <a:bodyPr/>
-          <a:lstStyle/>
-          <a:p>
-            <a:r>
-              <a:rPr lang="en-US" sz="2400" dirty="0">
-                <a:b/>
+            <a:off x="457200" y="80000"/>
+            <a:ext cx="11277600" cy="600000"/>
+          </a:xfrm>
+          <a:prstGeom prst="rect">
+            <a:avLst/>
+          </a:prstGeom>
+          <a:noFill/>
+        </p:spPr>
+        <p:txBody>
+          <a:bodyPr/>
+          <a:lstStyle/>
+          <a:p>
+            <a:r>
+              <a:rPr lang="en-US" sz="2600" dirty="0" b="1">
+                <a:solidFill>
+                  <a:srgbClr val="162A52"/>
+                </a:solidFill>
               </a:rPr>
               <a:t>H2 2026 Strategic Priorities</a:t>
             </a:r>
@@ -326,28 +358,32 @@
       </p:sp>
       <p:sp>
         <p:nvSpPr>
-          <p:cNvPr id="3" name="Body"/>
-          <p:cNvSpPr>
-            <a:spLocks noGrp="1"/>
-          </p:cNvSpPr>
-          <p:nvPr/>
-        </p:nvSpPr>
-        <p:spPr>
-          <a:xfrm>
-            <a:off x="457200" y="914400"/>
-            <a:ext cx="8229600" cy="457200"/>
-          </a:xfrm>
-          <a:prstGeom prst="rect">
-            <a:avLst/>
-          </a:prstGeom>
-          <a:noFill/>
-        </p:spPr>
-        <p:txBody>
-          <a:bodyPr/>
-          <a:lstStyle/>
-          <a:p>
-            <a:r>
-              <a:rPr lang="en-US" sz="1600" dirty="0"/>
+          <p:cNvPr id="3" name="B1"/>
+          <p:cNvSpPr>
+            <a:spLocks noGrp="1"/>
+          </p:cNvSpPr>
+          <p:nvPr/>
+        </p:nvSpPr>
+        <p:spPr>
+          <a:xfrm>
+            <a:off x="457200" y="780000"/>
+            <a:ext cx="11277600" cy="500000"/>
+          </a:xfrm>
+          <a:prstGeom prst="rect">
+            <a:avLst/>
+          </a:prstGeom>
+          <a:noFill/>
+        </p:spPr>
+        <p:txBody>
+          <a:bodyPr/>
+          <a:lstStyle/>
+          <a:p>
+            <a:r>
+              <a:rPr lang="en-US" sz="1800" dirty="0" b="0">
+                <a:solidFill>
+                  <a:srgbClr val="162A52"/>
+                </a:solidFill>
+              </a:rPr>
               <a:t>Electronic Health Records migration — go-live August 1</a:t>
             </a:r>
           </a:p>
@@ -355,28 +391,32 @@
       </p:sp>
       <p:sp>
         <p:nvSpPr>
-          <p:cNvPr id="4" name="Body2"/>
-          <p:cNvSpPr>
-            <a:spLocks noGrp="1"/>
-          </p:cNvSpPr>
-          <p:nvPr/>
-        </p:nvSpPr>
-        <p:spPr>
-          <a:xfrm>
-            <a:off x="457200" y="1371600"/>
-            <a:ext cx="8229600" cy="457200"/>
-          </a:xfrm>
-          <a:prstGeom prst="rect">
-            <a:avLst/>
-          </a:prstGeom>
-          <a:noFill/>
-        </p:spPr>
-        <p:txBody>
-          <a:bodyPr/>
-          <a:lstStyle/>
-          <a:p>
-            <a:r>
-              <a:rPr lang="en-US" sz="1600" dirty="0"/>
+          <p:cNvPr id="4" name="B2"/>
+          <p:cNvSpPr>
+            <a:spLocks noGrp="1"/>
+          </p:cNvSpPr>
+          <p:nvPr/>
+        </p:nvSpPr>
+        <p:spPr>
+          <a:xfrm>
+            <a:off x="457200" y="1380000"/>
+            <a:ext cx="11277600" cy="500000"/>
+          </a:xfrm>
+          <a:prstGeom prst="rect">
+            <a:avLst/>
+          </a:prstGeom>
+          <a:noFill/>
+        </p:spPr>
+        <p:txBody>
+          <a:bodyPr/>
+          <a:lstStyle/>
+          <a:p>
+            <a:r>
+              <a:rPr lang="en-US" sz="1800" dirty="0" b="0">
+                <a:solidFill>
+                  <a:srgbClr val="162A52"/>
+                </a:solidFill>
+              </a:rPr>
               <a:t>Telehealth expansion — 4 new clinics in Southwest region</a:t>
             </a:r>
           </a:p>
@@ -384,58 +424,66 @@
       </p:sp>
       <p:sp>
         <p:nvSpPr>
-          <p:cNvPr id="5" name="Body3"/>
-          <p:cNvSpPr>
-            <a:spLocks noGrp="1"/>
-          </p:cNvSpPr>
-          <p:nvPr/>
-        </p:nvSpPr>
-        <p:spPr>
-          <a:xfrm>
-            <a:off x="457200" y="1828800"/>
-            <a:ext cx="8229600" cy="457200"/>
-          </a:xfrm>
-          <a:prstGeom prst="rect">
-            <a:avLst/>
-          </a:prstGeom>
-          <a:noFill/>
-        </p:spPr>
-        <p:txBody>
-          <a:bodyPr/>
-          <a:lstStyle/>
-          <a:p>
-            <a:r>
-              <a:rPr lang="en-US" sz="1600" dirty="0"/>
-              <a:t>Staff retention program — $2.4M investment, Phase 1 launched</a:t>
-            </a:r>
-          </a:p>
-        </p:txBody>
-      </p:sp>
-      <p:sp>
-        <p:nvSpPr>
-          <p:cNvPr id="6" name="Body4"/>
-          <p:cNvSpPr>
-            <a:spLocks noGrp="1"/>
-          </p:cNvSpPr>
-          <p:nvPr/>
-        </p:nvSpPr>
-        <p:spPr>
-          <a:xfrm>
-            <a:off x="457200" y="2286000"/>
-            <a:ext cx="8229600" cy="457200"/>
-          </a:xfrm>
-          <a:prstGeom prst="rect">
-            <a:avLst/>
-          </a:prstGeom>
-          <a:noFill/>
-        </p:spPr>
-        <p:txBody>
-          <a:bodyPr/>
-          <a:lstStyle/>
-          <a:p>
-            <a:r>
-              <a:rPr lang="en-US" sz="1600" dirty="0"/>
-              <a:t>WCAG 2.1 AA accessibility compliance — 100% of patient-facing portals by Q4</a:t>
+          <p:cNvPr id="5" name="B3"/>
+          <p:cNvSpPr>
+            <a:spLocks noGrp="1"/>
+          </p:cNvSpPr>
+          <p:nvPr/>
+        </p:nvSpPr>
+        <p:spPr>
+          <a:xfrm>
+            <a:off x="457200" y="1980000"/>
+            <a:ext cx="11277600" cy="500000"/>
+          </a:xfrm>
+          <a:prstGeom prst="rect">
+            <a:avLst/>
+          </a:prstGeom>
+          <a:noFill/>
+        </p:spPr>
+        <p:txBody>
+          <a:bodyPr/>
+          <a:lstStyle/>
+          <a:p>
+            <a:r>
+              <a:rPr lang="en-US" sz="1800" dirty="0" b="0">
+                <a:solidFill>
+                  <a:srgbClr val="162A52"/>
+                </a:solidFill>
+              </a:rPr>
+              <a:t>Staff retention program — $2.4M investment, Phase 1 active</a:t>
+            </a:r>
+          </a:p>
+        </p:txBody>
+      </p:sp>
+      <p:sp>
+        <p:nvSpPr>
+          <p:cNvPr id="6" name="B4"/>
+          <p:cNvSpPr>
+            <a:spLocks noGrp="1"/>
+          </p:cNvSpPr>
+          <p:nvPr/>
+        </p:nvSpPr>
+        <p:spPr>
+          <a:xfrm>
+            <a:off x="457200" y="2580000"/>
+            <a:ext cx="11277600" cy="500000"/>
+          </a:xfrm>
+          <a:prstGeom prst="rect">
+            <a:avLst/>
+          </a:prstGeom>
+          <a:noFill/>
+        </p:spPr>
+        <p:txBody>
+          <a:bodyPr/>
+          <a:lstStyle/>
+          <a:p>
+            <a:r>
+              <a:rPr lang="en-US" sz="1800" dirty="0" b="0">
+                <a:solidFill>
+                  <a:srgbClr val="162A52"/>
+                </a:solidFill>
+              </a:rPr>
+              <a:t>WCAG 2.1 AA compliance — 100% of patient portals by Q4 2026</a:t>
             </a:r>
           </a:p>
         </p:txBody>
@@ -459,34 +507,34 @@
         <a:sysClr lastClr="FFFFFF" val="window"/>
       </a:lt1>
       <a:dk2>
-        <a:srgbClr val="44546A"/>
+        <a:srgbClr val="162A52"/>
       </a:dk2>
       <a:lt2>
-        <a:srgbClr val="E7E6E6"/>
+        <a:srgbClr val="F7F8FC"/>
       </a:lt2>
       <a:accent1>
-        <a:srgbClr val="4472C4"/>
+        <a:srgbClr val="1F5FA8"/>
       </a:accent1>
       <a:accent2>
-        <a:srgbClr val="ED7D31"/>
+        <a:srgbClr val="C2185B"/>
       </a:accent2>
       <a:accent3>
-        <a:srgbClr val="A9D18E"/>
+        <a:srgbClr val="3B6D11"/>
       </a:accent3>
       <a:accent4>
-        <a:srgbClr val="FFC000"/>
+        <a:srgbClr val="BF8C00"/>
       </a:accent4>
       <a:accent5>
-        <a:srgbClr val="5B9BD5"/>
+        <a:srgbClr val="4A5568"/>
       </a:accent5>
       <a:accent6>
-        <a:srgbClr val="70AD47"/>
+        <a:srgbClr val="E2E8F0"/>
       </a:accent6>
       <a:hlink>
-        <a:srgbClr val="0563C1"/>
+        <a:srgbClr val="1F5FA8"/>
       </a:hlink>
       <a:folHlink>
-        <a:srgbClr val="954F72"/>
+        <a:srgbClr val="4A5568"/>
       </a:folHlink>
     </a:clrScheme>
     <a:fontScheme name="Office">
